--- a/education/slides/CRG_Intro_Deck_FR.pptx
+++ b/education/slides/CRG_Intro_Deck_FR.pptx
@@ -2417,6 +2417,10 @@
           </a:solidFill>
           <a:ln/>
         </p:spPr>
+        <p:txBody>
+          <a:bodyPr/>
+          <a:p/>
+        </p:txBody>
       </p:sp>
       <p:sp>
         <p:nvSpPr>
@@ -2661,6 +2665,10 @@
           </a:solidFill>
           <a:ln/>
         </p:spPr>
+        <p:txBody>
+          <a:bodyPr/>
+          <a:p/>
+        </p:txBody>
       </p:sp>
       <p:sp>
         <p:nvSpPr>
@@ -2735,6 +2743,10 @@
           </a:solidFill>
           <a:ln/>
         </p:spPr>
+        <p:txBody>
+          <a:bodyPr/>
+          <a:p/>
+        </p:txBody>
       </p:sp>
       <p:sp>
         <p:nvSpPr>
@@ -2809,6 +2821,10 @@
           </a:solidFill>
           <a:ln/>
         </p:spPr>
+        <p:txBody>
+          <a:bodyPr/>
+          <a:p/>
+        </p:txBody>
       </p:sp>
       <p:sp>
         <p:nvSpPr>
@@ -3147,6 +3163,10 @@
             <a:prstDash val="solid"/>
           </a:ln>
         </p:spPr>
+        <p:txBody>
+          <a:bodyPr/>
+          <a:p/>
+        </p:txBody>
       </p:sp>
       <p:sp>
         <p:nvSpPr>
@@ -3322,6 +3342,10 @@
           </a:solidFill>
           <a:ln/>
         </p:spPr>
+        <p:txBody>
+          <a:bodyPr/>
+          <a:p/>
+        </p:txBody>
       </p:sp>
       <p:sp>
         <p:nvSpPr>
@@ -3388,6 +3412,10 @@
             <a:prstDash val="solid"/>
           </a:ln>
         </p:spPr>
+        <p:txBody>
+          <a:bodyPr/>
+          <a:p/>
+        </p:txBody>
       </p:sp>
       <p:sp>
         <p:nvSpPr>
@@ -3447,6 +3475,10 @@
           </a:solidFill>
           <a:ln/>
         </p:spPr>
+        <p:txBody>
+          <a:bodyPr/>
+          <a:p/>
+        </p:txBody>
       </p:sp>
       <p:sp>
         <p:nvSpPr>
@@ -3513,6 +3545,10 @@
             <a:prstDash val="solid"/>
           </a:ln>
         </p:spPr>
+        <p:txBody>
+          <a:bodyPr/>
+          <a:p/>
+        </p:txBody>
       </p:sp>
       <p:sp>
         <p:nvSpPr>
@@ -3572,6 +3608,10 @@
           </a:solidFill>
           <a:ln/>
         </p:spPr>
+        <p:txBody>
+          <a:bodyPr/>
+          <a:p/>
+        </p:txBody>
       </p:sp>
       <p:sp>
         <p:nvSpPr>
@@ -3638,6 +3678,10 @@
             <a:prstDash val="solid"/>
           </a:ln>
         </p:spPr>
+        <p:txBody>
+          <a:bodyPr/>
+          <a:p/>
+        </p:txBody>
       </p:sp>
       <p:sp>
         <p:nvSpPr>
@@ -3811,6 +3855,10 @@
           </a:solidFill>
           <a:ln/>
         </p:spPr>
+        <p:txBody>
+          <a:bodyPr/>
+          <a:p/>
+        </p:txBody>
       </p:sp>
       <p:sp>
         <p:nvSpPr>
@@ -3877,6 +3925,10 @@
             <a:prstDash val="solid"/>
           </a:ln>
         </p:spPr>
+        <p:txBody>
+          <a:bodyPr/>
+          <a:p/>
+        </p:txBody>
       </p:sp>
       <p:sp>
         <p:nvSpPr>
@@ -3911,7 +3963,7 @@
                 <a:ea typeface="Calibri" pitchFamily="34" charset="-122"/>
                 <a:cs typeface="Calibri" pitchFamily="34" charset="-120"/>
               </a:rPr>
-              <a:t>Plugiciel ou projet : collecte du contexte, scénarios 20→10, /crg-quick-scan, calculateur vérifié, contrôle des mentions</a:t>
+              <a:t>Plugiciel ou projet : collecte du contexte, scénarios 25–40 (20 en labo) → 10, /crg-quick-scan, calculateur vérifié, contrôle des mentions</a:t>
             </a:r>
             <a:endParaRPr lang="en-US" sz="1800" dirty="0"/>
           </a:p>
@@ -3936,6 +3988,10 @@
           </a:solidFill>
           <a:ln/>
         </p:spPr>
+        <p:txBody>
+          <a:bodyPr/>
+          <a:p/>
+        </p:txBody>
       </p:sp>
       <p:sp>
         <p:nvSpPr>
@@ -4002,6 +4058,10 @@
             <a:prstDash val="solid"/>
           </a:ln>
         </p:spPr>
+        <p:txBody>
+          <a:bodyPr/>
+          <a:p/>
+        </p:txBody>
       </p:sp>
       <p:sp>
         <p:nvSpPr>
@@ -4061,6 +4121,10 @@
           </a:solidFill>
           <a:ln/>
         </p:spPr>
+        <p:txBody>
+          <a:bodyPr/>
+          <a:p/>
+        </p:txBody>
       </p:sp>
       <p:sp>
         <p:nvSpPr>
@@ -4127,6 +4191,10 @@
             <a:prstDash val="solid"/>
           </a:ln>
         </p:spPr>
+        <p:txBody>
+          <a:bodyPr/>
+          <a:p/>
+        </p:txBody>
       </p:sp>
       <p:sp>
         <p:nvSpPr>
@@ -4305,6 +4373,10 @@
             <a:prstDash val="solid"/>
           </a:ln>
         </p:spPr>
+        <p:txBody>
+          <a:bodyPr/>
+          <a:p/>
+        </p:txBody>
       </p:sp>
       <p:sp>
         <p:nvSpPr>
@@ -4371,6 +4443,10 @@
             <a:prstDash val="solid"/>
           </a:ln>
         </p:spPr>
+        <p:txBody>
+          <a:bodyPr/>
+          <a:p/>
+        </p:txBody>
       </p:sp>
       <p:sp>
         <p:nvSpPr>
@@ -4437,6 +4513,10 @@
             <a:prstDash val="solid"/>
           </a:ln>
         </p:spPr>
+        <p:txBody>
+          <a:bodyPr/>
+          <a:p/>
+        </p:txBody>
       </p:sp>
       <p:sp>
         <p:nvSpPr>
@@ -4503,6 +4583,10 @@
             <a:prstDash val="solid"/>
           </a:ln>
         </p:spPr>
+        <p:txBody>
+          <a:bodyPr/>
+          <a:p/>
+        </p:txBody>
       </p:sp>
       <p:sp>
         <p:nvSpPr>
@@ -4569,6 +4653,10 @@
             <a:prstDash val="solid"/>
           </a:ln>
         </p:spPr>
+        <p:txBody>
+          <a:bodyPr/>
+          <a:p/>
+        </p:txBody>
       </p:sp>
       <p:sp>
         <p:nvSpPr>
@@ -4635,6 +4723,10 @@
             <a:prstDash val="solid"/>
           </a:ln>
         </p:spPr>
+        <p:txBody>
+          <a:bodyPr/>
+          <a:p/>
+        </p:txBody>
       </p:sp>
       <p:sp>
         <p:nvSpPr>
@@ -4701,6 +4793,10 @@
             <a:prstDash val="solid"/>
           </a:ln>
         </p:spPr>
+        <p:txBody>
+          <a:bodyPr/>
+          <a:p/>
+        </p:txBody>
       </p:sp>
       <p:sp>
         <p:nvSpPr>
@@ -4767,6 +4863,10 @@
             <a:prstDash val="solid"/>
           </a:ln>
         </p:spPr>
+        <p:txBody>
+          <a:bodyPr/>
+          <a:p/>
+        </p:txBody>
       </p:sp>
       <p:sp>
         <p:nvSpPr>
@@ -4833,6 +4933,10 @@
             <a:prstDash val="solid"/>
           </a:ln>
         </p:spPr>
+        <p:txBody>
+          <a:bodyPr/>
+          <a:p/>
+        </p:txBody>
       </p:sp>
       <p:sp>
         <p:nvSpPr>
@@ -4899,6 +5003,10 @@
             <a:prstDash val="solid"/>
           </a:ln>
         </p:spPr>
+        <p:txBody>
+          <a:bodyPr/>
+          <a:p/>
+        </p:txBody>
       </p:sp>
       <p:sp>
         <p:nvSpPr>
@@ -4965,6 +5073,10 @@
             <a:prstDash val="solid"/>
           </a:ln>
         </p:spPr>
+        <p:txBody>
+          <a:bodyPr/>
+          <a:p/>
+        </p:txBody>
       </p:sp>
       <p:sp>
         <p:nvSpPr>
@@ -5031,6 +5143,10 @@
             <a:prstDash val="solid"/>
           </a:ln>
         </p:spPr>
+        <p:txBody>
+          <a:bodyPr/>
+          <a:p/>
+        </p:txBody>
       </p:sp>
       <p:sp>
         <p:nvSpPr>
@@ -5097,6 +5213,10 @@
             <a:prstDash val="solid"/>
           </a:ln>
         </p:spPr>
+        <p:txBody>
+          <a:bodyPr/>
+          <a:p/>
+        </p:txBody>
       </p:sp>
       <p:sp>
         <p:nvSpPr>
@@ -5272,6 +5392,10 @@
           </a:solidFill>
           <a:ln/>
         </p:spPr>
+        <p:txBody>
+          <a:bodyPr/>
+          <a:p/>
+        </p:txBody>
       </p:sp>
       <p:sp>
         <p:nvSpPr>
@@ -5338,6 +5462,10 @@
             <a:prstDash val="solid"/>
           </a:ln>
         </p:spPr>
+        <p:txBody>
+          <a:bodyPr/>
+          <a:p/>
+        </p:txBody>
       </p:sp>
       <p:sp>
         <p:nvSpPr>
@@ -5397,6 +5525,10 @@
           </a:solidFill>
           <a:ln/>
         </p:spPr>
+        <p:txBody>
+          <a:bodyPr/>
+          <a:p/>
+        </p:txBody>
       </p:sp>
       <p:sp>
         <p:nvSpPr>
@@ -5463,6 +5595,10 @@
             <a:prstDash val="solid"/>
           </a:ln>
         </p:spPr>
+        <p:txBody>
+          <a:bodyPr/>
+          <a:p/>
+        </p:txBody>
       </p:sp>
       <p:sp>
         <p:nvSpPr>
@@ -5522,6 +5658,10 @@
           </a:solidFill>
           <a:ln/>
         </p:spPr>
+        <p:txBody>
+          <a:bodyPr/>
+          <a:p/>
+        </p:txBody>
       </p:sp>
       <p:sp>
         <p:nvSpPr>
@@ -5588,6 +5728,10 @@
             <a:prstDash val="solid"/>
           </a:ln>
         </p:spPr>
+        <p:txBody>
+          <a:bodyPr/>
+          <a:p/>
+        </p:txBody>
       </p:sp>
       <p:sp>
         <p:nvSpPr>
@@ -5799,7 +5943,7 @@
                 <a:ea typeface="Consolas" pitchFamily="34" charset="-122"/>
                 <a:cs typeface="Consolas" pitchFamily="34" charset="-120"/>
               </a:rPr>
-              <a:t>« moteur vérifié · 84 491 / 41 104 »</a:t>
+              <a:t>« moteur vérifié · 84 305 / 41 023 »</a:t>
             </a:r>
             <a:endParaRPr lang="en-US" sz="2100" dirty="0"/>
           </a:p>
@@ -6262,6 +6406,10 @@
           </a:solidFill>
           <a:ln/>
         </p:spPr>
+        <p:txBody>
+          <a:bodyPr/>
+          <a:p/>
+        </p:txBody>
       </p:sp>
       <p:sp>
         <p:nvSpPr>
@@ -6420,6 +6568,10 @@
           </a:solidFill>
           <a:ln/>
         </p:spPr>
+        <p:txBody>
+          <a:bodyPr/>
+          <a:p/>
+        </p:txBody>
       </p:sp>
       <p:sp>
         <p:nvSpPr>
@@ -6578,6 +6730,10 @@
           </a:solidFill>
           <a:ln/>
         </p:spPr>
+        <p:txBody>
+          <a:bodyPr/>
+          <a:p/>
+        </p:txBody>
       </p:sp>
       <p:sp>
         <p:nvSpPr>
@@ -6614,7 +6770,7 @@
                 <a:ea typeface="Calibri" pitchFamily="34" charset="-122"/>
                 <a:cs typeface="Calibri" pitchFamily="34" charset="-120"/>
               </a:rPr>
-              <a:t>20 candidats</a:t>
+              <a:t>25 à 40 candidats (20 en labo)</a:t>
             </a:r>
             <a:endParaRPr lang="en-US" sz="1400" dirty="0"/>
           </a:p>
@@ -6736,6 +6892,10 @@
           </a:solidFill>
           <a:ln/>
         </p:spPr>
+        <p:txBody>
+          <a:bodyPr/>
+          <a:p/>
+        </p:txBody>
       </p:sp>
       <p:sp>
         <p:nvSpPr>
@@ -6894,6 +7054,10 @@
           </a:solidFill>
           <a:ln/>
         </p:spPr>
+        <p:txBody>
+          <a:bodyPr/>
+          <a:p/>
+        </p:txBody>
       </p:sp>
       <p:sp>
         <p:nvSpPr>
@@ -7052,6 +7216,10 @@
           </a:solidFill>
           <a:ln/>
         </p:spPr>
+        <p:txBody>
+          <a:bodyPr/>
+          <a:p/>
+        </p:txBody>
       </p:sp>
       <p:sp>
         <p:nvSpPr>
@@ -7210,6 +7378,10 @@
           </a:solidFill>
           <a:ln/>
         </p:spPr>
+        <p:txBody>
+          <a:bodyPr/>
+          <a:p/>
+        </p:txBody>
       </p:sp>
       <p:sp>
         <p:nvSpPr>
@@ -7441,6 +7613,10 @@
           </a:solidFill>
           <a:ln/>
         </p:spPr>
+        <p:txBody>
+          <a:bodyPr/>
+          <a:p/>
+        </p:txBody>
       </p:sp>
       <p:sp>
         <p:nvSpPr>
@@ -7502,6 +7678,10 @@
           </a:solidFill>
           <a:ln/>
         </p:spPr>
+        <p:txBody>
+          <a:bodyPr/>
+          <a:p/>
+        </p:txBody>
       </p:sp>
       <p:sp>
         <p:nvSpPr>
@@ -7563,6 +7743,10 @@
           </a:solidFill>
           <a:ln/>
         </p:spPr>
+        <p:txBody>
+          <a:bodyPr/>
+          <a:p/>
+        </p:txBody>
       </p:sp>
       <p:sp>
         <p:nvSpPr>
@@ -7624,6 +7808,10 @@
           </a:solidFill>
           <a:ln/>
         </p:spPr>
+        <p:txBody>
+          <a:bodyPr/>
+          <a:p/>
+        </p:txBody>
       </p:sp>
       <p:sp>
         <p:nvSpPr>
@@ -7685,6 +7873,10 @@
           </a:solidFill>
           <a:ln/>
         </p:spPr>
+        <p:txBody>
+          <a:bodyPr/>
+          <a:p/>
+        </p:txBody>
       </p:sp>
       <p:sp>
         <p:nvSpPr>
@@ -7790,6 +7982,10 @@
             <a:prstDash val="solid"/>
           </a:ln>
         </p:spPr>
+        <p:txBody>
+          <a:bodyPr/>
+          <a:p/>
+        </p:txBody>
       </p:sp>
       <p:sp>
         <p:nvSpPr>
@@ -9501,6 +9697,10 @@
             <a:prstDash val="solid"/>
           </a:ln>
         </p:spPr>
+        <p:txBody>
+          <a:bodyPr/>
+          <a:p/>
+        </p:txBody>
       </p:sp>
       <p:sp>
         <p:nvSpPr>
@@ -10773,6 +10973,10 @@
           </a:solidFill>
           <a:ln/>
         </p:spPr>
+        <p:txBody>
+          <a:bodyPr/>
+          <a:p/>
+        </p:txBody>
       </p:sp>
       <p:sp>
         <p:nvSpPr>
@@ -10849,6 +11053,10 @@
           </a:solidFill>
           <a:ln/>
         </p:spPr>
+        <p:txBody>
+          <a:bodyPr/>
+          <a:p/>
+        </p:txBody>
       </p:sp>
       <p:sp>
         <p:nvSpPr>
@@ -10925,6 +11133,10 @@
           </a:solidFill>
           <a:ln/>
         </p:spPr>
+        <p:txBody>
+          <a:bodyPr/>
+          <a:p/>
+        </p:txBody>
       </p:sp>
       <p:sp>
         <p:nvSpPr>
@@ -11001,6 +11213,10 @@
           </a:solidFill>
           <a:ln/>
         </p:spPr>
+        <p:txBody>
+          <a:bodyPr/>
+          <a:p/>
+        </p:txBody>
       </p:sp>
       <p:sp>
         <p:nvSpPr>
@@ -11228,6 +11444,10 @@
           </a:solidFill>
           <a:ln/>
         </p:spPr>
+        <p:txBody>
+          <a:bodyPr/>
+          <a:p/>
+        </p:txBody>
       </p:sp>
       <p:sp>
         <p:nvSpPr>
@@ -11302,6 +11522,10 @@
           </a:solidFill>
           <a:ln/>
         </p:spPr>
+        <p:txBody>
+          <a:bodyPr/>
+          <a:p/>
+        </p:txBody>
       </p:sp>
       <p:sp>
         <p:nvSpPr>
@@ -11376,6 +11600,10 @@
           </a:solidFill>
           <a:ln/>
         </p:spPr>
+        <p:txBody>
+          <a:bodyPr/>
+          <a:p/>
+        </p:txBody>
       </p:sp>
       <p:sp>
         <p:nvSpPr>
